--- a/ВКР, отчет/ВКР, презентация/ВКР, презентация (слайды).pptx
+++ b/ВКР, отчет/ВКР, презентация/ВКР, презентация (слайды).pptx
@@ -228,7 +228,7 @@
           <a:p>
             <a:fld id="{6D4359DB-E3B5-42B0-BC8D-BB5F2F09E98B}" type="datetimeFigureOut">
               <a:rPr lang="ru-RU" smtClean="0"/>
-              <a:t>11.06.2026</a:t>
+              <a:t>15.06.2026</a:t>
             </a:fld>
             <a:endParaRPr lang="ru-RU"/>
           </a:p>
@@ -10227,36 +10227,6 @@
           </a:p>
         </p:txBody>
       </p:sp>
-      <p:pic>
-        <p:nvPicPr>
-          <p:cNvPr id="5" name="Рисунок 4">
-            <a:extLst>
-              <a:ext uri="{FF2B5EF4-FFF2-40B4-BE49-F238E27FC236}">
-                <a16:creationId xmlns:a16="http://schemas.microsoft.com/office/drawing/2014/main" id="{39846EC4-AADD-A998-878B-62ACF84F383B}"/>
-              </a:ext>
-            </a:extLst>
-          </p:cNvPr>
-          <p:cNvPicPr>
-            <a:picLocks noChangeAspect="1"/>
-          </p:cNvPicPr>
-          <p:nvPr/>
-        </p:nvPicPr>
-        <p:blipFill>
-          <a:blip r:embed="rId2"/>
-          <a:stretch>
-            <a:fillRect/>
-          </a:stretch>
-        </p:blipFill>
-        <p:spPr>
-          <a:xfrm>
-            <a:off x="295274" y="1209926"/>
-            <a:ext cx="11605998" cy="4750642"/>
-          </a:xfrm>
-          <a:prstGeom prst="rect">
-            <a:avLst/>
-          </a:prstGeom>
-        </p:spPr>
-      </p:pic>
       <p:sp>
         <p:nvSpPr>
           <p:cNvPr id="6" name="Номер слайда 5">
@@ -10295,6 +10265,36 @@
           </a:p>
         </p:txBody>
       </p:sp>
+      <p:pic>
+        <p:nvPicPr>
+          <p:cNvPr id="12" name="Рисунок 11">
+            <a:extLst>
+              <a:ext uri="{FF2B5EF4-FFF2-40B4-BE49-F238E27FC236}">
+                <a16:creationId xmlns:a16="http://schemas.microsoft.com/office/drawing/2014/main" id="{92D15407-D80B-59C4-AFB1-1ED5ECD50AD2}"/>
+              </a:ext>
+            </a:extLst>
+          </p:cNvPr>
+          <p:cNvPicPr>
+            <a:picLocks noChangeAspect="1"/>
+          </p:cNvPicPr>
+          <p:nvPr/>
+        </p:nvPicPr>
+        <p:blipFill>
+          <a:blip r:embed="rId2"/>
+          <a:stretch>
+            <a:fillRect/>
+          </a:stretch>
+        </p:blipFill>
+        <p:spPr>
+          <a:xfrm>
+            <a:off x="295274" y="933721"/>
+            <a:ext cx="11601451" cy="5183783"/>
+          </a:xfrm>
+          <a:prstGeom prst="rect">
+            <a:avLst/>
+          </a:prstGeom>
+        </p:spPr>
+      </p:pic>
     </p:spTree>
     <p:extLst>
       <p:ext uri="{BB962C8B-B14F-4D97-AF65-F5344CB8AC3E}">

--- a/ВКР, отчет/ВКР, презентация/ВКР, презентация (слайды).pptx
+++ b/ВКР, отчет/ВКР, презентация/ВКР, презентация (слайды).pptx
@@ -16081,7 +16081,7 @@
           <p:nvPr>
             <p:extLst>
               <p:ext uri="{D42A27DB-BD31-4B8C-83A1-F6EECF244321}">
-                <p14:modId xmlns:p14="http://schemas.microsoft.com/office/powerpoint/2010/main" val="1389412825"/>
+                <p14:modId xmlns:p14="http://schemas.microsoft.com/office/powerpoint/2010/main" val="3836843464"/>
               </p:ext>
             </p:extLst>
           </p:nvPr>
@@ -16769,12 +16769,12 @@
                         <a:buChar char="-"/>
                       </a:pPr>
                       <a:r>
-                        <a:rPr lang="ru-RU" sz="1800" dirty="0" err="1">
+                        <a:rPr lang="ru-RU" sz="1800" dirty="0">
                           <a:solidFill>
                             <a:srgbClr val="2A1468"/>
                           </a:solidFill>
                         </a:rPr>
-                        <a:t>Скрость</a:t>
+                        <a:t>Скорость</a:t>
                       </a:r>
                       <a:r>
                         <a:rPr lang="en-US" sz="1800" dirty="0">

--- a/ВКР, отчет/ВКР, презентация/ВКР, презентация (слайды).pptx
+++ b/ВКР, отчет/ВКР, презентация/ВКР, презентация (слайды).pptx
@@ -5,7 +5,7 @@
     <p:sldMasterId id="2147483660" r:id="rId1"/>
   </p:sldMasterIdLst>
   <p:notesMasterIdLst>
-    <p:notesMasterId r:id="rId23"/>
+    <p:notesMasterId r:id="rId22"/>
   </p:notesMasterIdLst>
   <p:sldIdLst>
     <p:sldId id="256" r:id="rId2"/>
@@ -28,7 +28,6 @@
     <p:sldId id="373" r:id="rId19"/>
     <p:sldId id="374" r:id="rId20"/>
     <p:sldId id="375" r:id="rId21"/>
-    <p:sldId id="376" r:id="rId22"/>
   </p:sldIdLst>
   <p:sldSz cx="12192000" cy="6858000"/>
   <p:notesSz cx="6761163" cy="9882188"/>
@@ -228,7 +227,7 @@
           <a:p>
             <a:fld id="{6D4359DB-E3B5-42B0-BC8D-BB5F2F09E98B}" type="datetimeFigureOut">
               <a:rPr lang="ru-RU" smtClean="0"/>
-              <a:t>15.06.2026</a:t>
+              <a:t>17.06.2026</a:t>
             </a:fld>
             <a:endParaRPr lang="ru-RU"/>
           </a:p>
@@ -8910,15 +8909,20 @@
           <p:nvPr/>
         </p:nvPicPr>
         <p:blipFill>
-          <a:blip r:embed="rId2"/>
-          <a:stretch>
-            <a:fillRect/>
-          </a:stretch>
+          <a:blip r:embed="rId2">
+            <a:extLst>
+              <a:ext uri="{28A0092B-C50C-407E-A947-70E740481C1C}">
+                <a14:useLocalDpi xmlns:a14="http://schemas.microsoft.com/office/drawing/2010/main" val="0"/>
+              </a:ext>
+            </a:extLst>
+          </a:blip>
+          <a:srcRect/>
+          <a:stretch/>
         </p:blipFill>
         <p:spPr>
           <a:xfrm>
-            <a:off x="7185366" y="0"/>
-            <a:ext cx="4390846" cy="6858000"/>
+            <a:off x="6822169" y="15851"/>
+            <a:ext cx="4662709" cy="6826298"/>
           </a:xfrm>
           <a:prstGeom prst="rect">
             <a:avLst/>
@@ -8940,15 +8944,20 @@
           <p:nvPr/>
         </p:nvPicPr>
         <p:blipFill>
-          <a:blip r:embed="rId3"/>
-          <a:stretch>
-            <a:fillRect/>
-          </a:stretch>
+          <a:blip r:embed="rId3">
+            <a:extLst>
+              <a:ext uri="{28A0092B-C50C-407E-A947-70E740481C1C}">
+                <a14:useLocalDpi xmlns:a14="http://schemas.microsoft.com/office/drawing/2010/main" val="0"/>
+              </a:ext>
+            </a:extLst>
+          </a:blip>
+          <a:srcRect/>
+          <a:stretch/>
         </p:blipFill>
         <p:spPr>
           <a:xfrm>
-            <a:off x="295276" y="0"/>
-            <a:ext cx="5814994" cy="6858000"/>
+            <a:off x="281006" y="15851"/>
+            <a:ext cx="5814994" cy="6826297"/>
           </a:xfrm>
           <a:prstGeom prst="rect">
             <a:avLst/>
@@ -10858,130 +10867,6 @@
     <p:extLst>
       <p:ext uri="{BB962C8B-B14F-4D97-AF65-F5344CB8AC3E}">
         <p14:creationId xmlns:p14="http://schemas.microsoft.com/office/powerpoint/2010/main" val="2595652962"/>
-      </p:ext>
-    </p:extLst>
-  </p:cSld>
-  <p:clrMapOvr>
-    <a:masterClrMapping/>
-  </p:clrMapOvr>
-</p:sld>
-</file>
-
-<file path=ppt/slides/slide21.xml><?xml version="1.0" encoding="utf-8"?>
-<p:sld xmlns:a="http://schemas.openxmlformats.org/drawingml/2006/main" xmlns:r="http://schemas.openxmlformats.org/officeDocument/2006/relationships" xmlns:p="http://schemas.openxmlformats.org/presentationml/2006/main">
-  <p:cSld>
-    <p:spTree>
-      <p:nvGrpSpPr>
-        <p:cNvPr id="1" name=""/>
-        <p:cNvGrpSpPr/>
-        <p:nvPr/>
-      </p:nvGrpSpPr>
-      <p:grpSpPr>
-        <a:xfrm>
-          <a:off x="0" y="0"/>
-          <a:ext cx="0" cy="0"/>
-          <a:chOff x="0" y="0"/>
-          <a:chExt cx="0" cy="0"/>
-        </a:xfrm>
-      </p:grpSpPr>
-      <p:sp>
-        <p:nvSpPr>
-          <p:cNvPr id="2" name="Подзаголовок 1">
-            <a:extLst>
-              <a:ext uri="{FF2B5EF4-FFF2-40B4-BE49-F238E27FC236}">
-                <a16:creationId xmlns:a16="http://schemas.microsoft.com/office/drawing/2014/main" id="{ED1156A7-13D4-26B1-5F4C-3D12087028AE}"/>
-              </a:ext>
-            </a:extLst>
-          </p:cNvPr>
-          <p:cNvSpPr>
-            <a:spLocks noGrp="1"/>
-          </p:cNvSpPr>
-          <p:nvPr>
-            <p:ph type="subTitle" idx="1"/>
-          </p:nvPr>
-        </p:nvSpPr>
-        <p:spPr/>
-        <p:txBody>
-          <a:bodyPr/>
-          <a:lstStyle/>
-          <a:p>
-            <a:r>
-              <a:rPr lang="ru-RU" dirty="0"/>
-              <a:t>Типа картинка и красивый слайд)))</a:t>
-            </a:r>
-          </a:p>
-        </p:txBody>
-      </p:sp>
-      <p:sp>
-        <p:nvSpPr>
-          <p:cNvPr id="3" name="Текст 2">
-            <a:extLst>
-              <a:ext uri="{FF2B5EF4-FFF2-40B4-BE49-F238E27FC236}">
-                <a16:creationId xmlns:a16="http://schemas.microsoft.com/office/drawing/2014/main" id="{35D92CA9-8AD0-172F-9C6B-0915C0430AC2}"/>
-              </a:ext>
-            </a:extLst>
-          </p:cNvPr>
-          <p:cNvSpPr>
-            <a:spLocks noGrp="1"/>
-          </p:cNvSpPr>
-          <p:nvPr>
-            <p:ph type="body" sz="quarter" idx="13"/>
-          </p:nvPr>
-        </p:nvSpPr>
-        <p:spPr/>
-        <p:txBody>
-          <a:bodyPr/>
-          <a:lstStyle/>
-          <a:p>
-            <a:r>
-              <a:rPr lang="ru-RU" dirty="0"/>
-              <a:t>Спасибо за внимание</a:t>
-            </a:r>
-          </a:p>
-        </p:txBody>
-      </p:sp>
-      <p:sp>
-        <p:nvSpPr>
-          <p:cNvPr id="6" name="Номер слайда 5">
-            <a:extLst>
-              <a:ext uri="{FF2B5EF4-FFF2-40B4-BE49-F238E27FC236}">
-                <a16:creationId xmlns:a16="http://schemas.microsoft.com/office/drawing/2014/main" id="{A046F9A4-35A1-FF8D-92A0-5E5633AE26D5}"/>
-              </a:ext>
-            </a:extLst>
-          </p:cNvPr>
-          <p:cNvSpPr>
-            <a:spLocks noGrp="1"/>
-          </p:cNvSpPr>
-          <p:nvPr>
-            <p:ph type="sldNum" sz="quarter" idx="4"/>
-          </p:nvPr>
-        </p:nvSpPr>
-        <p:spPr/>
-        <p:txBody>
-          <a:bodyPr/>
-          <a:lstStyle/>
-          <a:p>
-            <a:fld id="{FF35AAD1-A493-400F-9DA1-8BA2671D97BC}" type="slidenum">
-              <a:rPr lang="ru-RU" smtClean="0"/>
-              <a:pPr/>
-              <a:t>21</a:t>
-            </a:fld>
-            <a:r>
-              <a:rPr lang="ru-RU"/>
-              <a:t> </a:t>
-            </a:r>
-            <a:r>
-              <a:rPr lang="en-US"/>
-              <a:t>/ 20</a:t>
-            </a:r>
-            <a:endParaRPr lang="ru-RU" sz="2000" dirty="0"/>
-          </a:p>
-        </p:txBody>
-      </p:sp>
-    </p:spTree>
-    <p:extLst>
-      <p:ext uri="{BB962C8B-B14F-4D97-AF65-F5344CB8AC3E}">
-        <p14:creationId xmlns:p14="http://schemas.microsoft.com/office/powerpoint/2010/main" val="3005855960"/>
       </p:ext>
     </p:extLst>
   </p:cSld>

--- a/ВКР, отчет/ВКР, презентация/ВКР, презентация (слайды).pptx
+++ b/ВКР, отчет/ВКР, презентация/ВКР, презентация (слайды).pptx
@@ -9575,18 +9575,13 @@
               <a:t>Tkinter</a:t>
             </a:r>
             <a:r>
-              <a:rPr lang="ru-RU">
+              <a:rPr lang="ru-RU" dirty="0">
                 <a:solidFill>
                   <a:srgbClr val="000000"/>
                 </a:solidFill>
               </a:rPr>
               <a:t>».</a:t>
             </a:r>
-            <a:endParaRPr lang="ru-RU" dirty="0">
-              <a:solidFill>
-                <a:srgbClr val="000000"/>
-              </a:solidFill>
-            </a:endParaRPr>
           </a:p>
         </p:txBody>
       </p:sp>
@@ -10132,7 +10127,7 @@
         </p:blipFill>
         <p:spPr>
           <a:xfrm>
-            <a:off x="667310" y="1048849"/>
+            <a:off x="667310" y="1075608"/>
             <a:ext cx="10857378" cy="5072795"/>
           </a:xfrm>
           <a:prstGeom prst="rect">
@@ -10296,7 +10291,7 @@
         </p:blipFill>
         <p:spPr>
           <a:xfrm>
-            <a:off x="295274" y="933721"/>
+            <a:off x="295273" y="933721"/>
             <a:ext cx="11601451" cy="5183783"/>
           </a:xfrm>
           <a:prstGeom prst="rect">
@@ -10405,7 +10400,7 @@
             </a:pPr>
             <a:r>
               <a:rPr lang="ru-RU" sz="2000" dirty="0"/>
-              <a:t>Наличие экспериментальной базы сплавов – для исследования доступна ранее не использованная для данной темы выборка из 220 образцов, позволяющая обучать и сравнивать модели машинного обучения.</a:t>
+              <a:t>Наличие экспериментальной базы сплавов – для исследования доступна выборка из 220 образцов стоматологических сплавов.</a:t>
             </a:r>
           </a:p>
         </p:txBody>
@@ -10960,7 +10955,7 @@
             </a:pPr>
             <a:r>
               <a:rPr lang="ru-RU" dirty="0"/>
-              <a:t>Провести анализ предметной области и существующих программных решений для прогнозирования свойств медицинских композитов;</a:t>
+              <a:t>Провести анализ предметной области и существующих программных решений для прогнозирования свойств медицинских композиционных материалов;</a:t>
             </a:r>
           </a:p>
           <a:p>
@@ -11147,13 +11142,13 @@
           <p:nvPr>
             <p:extLst>
               <p:ext uri="{D42A27DB-BD31-4B8C-83A1-F6EECF244321}">
-                <p14:modId xmlns:p14="http://schemas.microsoft.com/office/powerpoint/2010/main" val="703808876"/>
+                <p14:modId xmlns:p14="http://schemas.microsoft.com/office/powerpoint/2010/main" val="1429785948"/>
               </p:ext>
             </p:extLst>
           </p:nvPr>
         </p:nvGraphicFramePr>
         <p:xfrm>
-          <a:off x="295276" y="1140644"/>
+          <a:off x="295276" y="1092483"/>
           <a:ext cx="11601448" cy="5039044"/>
         </p:xfrm>
         <a:graphic>
@@ -13537,7 +13532,7 @@
         </p:blipFill>
         <p:spPr>
           <a:xfrm>
-            <a:off x="1613057" y="999087"/>
+            <a:off x="1613057" y="1025846"/>
             <a:ext cx="8965884" cy="5172319"/>
           </a:xfrm>
           <a:prstGeom prst="rect">
@@ -13663,7 +13658,7 @@
         </p:blipFill>
         <p:spPr>
           <a:xfrm>
-            <a:off x="619812" y="969006"/>
+            <a:off x="619812" y="995764"/>
             <a:ext cx="10952373" cy="5232482"/>
           </a:xfrm>
           <a:prstGeom prst="rect">
@@ -15966,13 +15961,13 @@
           <p:nvPr>
             <p:extLst>
               <p:ext uri="{D42A27DB-BD31-4B8C-83A1-F6EECF244321}">
-                <p14:modId xmlns:p14="http://schemas.microsoft.com/office/powerpoint/2010/main" val="3836843464"/>
+                <p14:modId xmlns:p14="http://schemas.microsoft.com/office/powerpoint/2010/main" val="2871972556"/>
               </p:ext>
             </p:extLst>
           </p:nvPr>
         </p:nvGraphicFramePr>
         <p:xfrm>
-          <a:off x="295274" y="1164485"/>
+          <a:off x="295274" y="1191243"/>
           <a:ext cx="11601451" cy="4841524"/>
         </p:xfrm>
         <a:graphic>

--- a/ВКР, отчет/ВКР, презентация/ВКР, презентация (слайды).pptx
+++ b/ВКР, отчет/ВКР, презентация/ВКР, презентация (слайды).pptx
@@ -227,7 +227,7 @@
           <a:p>
             <a:fld id="{6D4359DB-E3B5-42B0-BC8D-BB5F2F09E98B}" type="datetimeFigureOut">
               <a:rPr lang="ru-RU" smtClean="0"/>
-              <a:t>17.06.2026</a:t>
+              <a:t>18.06.2026</a:t>
             </a:fld>
             <a:endParaRPr lang="ru-RU"/>
           </a:p>
@@ -7314,7 +7314,7 @@
                       <a:srgbClr val="000000"/>
                     </a:solidFill>
                   </a:rPr>
-                  <a:t>Функция потерь – среднеквадратическая ошибка </a:t>
+                  <a:t>Функция потерь – среднеквадратичная ошибка </a:t>
                 </a:r>
                 <a14:m>
                   <m:oMath xmlns:m="http://schemas.openxmlformats.org/officeDocument/2006/math">
@@ -7452,13 +7452,13 @@
                                   </m:sSubPr>
                                   <m:e>
                                     <m:r>
-                                      <a:rPr lang="en-US" sz="2000" i="1">
+                                      <a:rPr lang="en-US" sz="2000" b="0" i="1" smtClean="0">
                                         <a:solidFill>
                                           <a:srgbClr val="000000"/>
                                         </a:solidFill>
                                         <a:latin typeface="Cambria Math" panose="02040503050406030204" pitchFamily="18" charset="0"/>
                                       </a:rPr>
-                                      <m:t>𝑦</m:t>
+                                      <m:t>𝑌</m:t>
                                     </m:r>
                                   </m:e>
                                   <m:sub>
@@ -7508,13 +7508,13 @@
                                       </m:accPr>
                                       <m:e>
                                         <m:r>
-                                          <a:rPr lang="en-US" sz="2000" i="1">
+                                          <a:rPr lang="en-US" sz="2000" b="0" i="1" smtClean="0">
                                             <a:solidFill>
                                               <a:srgbClr val="000000"/>
                                             </a:solidFill>
                                             <a:latin typeface="Cambria Math" panose="02040503050406030204" pitchFamily="18" charset="0"/>
                                           </a:rPr>
-                                          <m:t>𝑦</m:t>
+                                          <m:t>𝑌</m:t>
                                         </m:r>
                                       </m:e>
                                     </m:acc>
@@ -7588,7 +7588,7 @@
                             </a:solidFill>
                             <a:latin typeface="Cambria Math" panose="02040503050406030204" pitchFamily="18" charset="0"/>
                           </a:rPr>
-                          <m:t>𝑦</m:t>
+                          <m:t>𝑌</m:t>
                         </m:r>
                       </m:e>
                       <m:sub>
@@ -7627,16 +7627,13 @@
                       <a:srgbClr val="000000"/>
                     </a:solidFill>
                   </a:rPr>
-                  <a:t>;</a:t>
+                  <a:t>,</a:t>
                 </a:r>
-                <a:r>
-                  <a:rPr lang="ru-RU" sz="2000" dirty="0">
-                    <a:solidFill>
-                      <a:srgbClr val="000000"/>
-                    </a:solidFill>
-                  </a:rPr>
-                  <a:t> </a:t>
-                </a:r>
+                <a:endParaRPr lang="ru-RU" sz="2000" dirty="0">
+                  <a:solidFill>
+                    <a:srgbClr val="000000"/>
+                  </a:solidFill>
+                </a:endParaRPr>
               </a:p>
               <a:p>
                 <a:pPr marL="800100" lvl="1" indent="-342900" algn="just">
@@ -7651,7 +7648,7 @@
                     <m:sSub>
                       <m:sSubPr>
                         <m:ctrlPr>
-                          <a:rPr lang="ru-RU" sz="2000" i="1">
+                          <a:rPr lang="ru-RU" sz="2000" i="1" smtClean="0">
                             <a:solidFill>
                               <a:srgbClr val="000000"/>
                             </a:solidFill>
@@ -7674,13 +7671,13 @@
                           </m:accPr>
                           <m:e>
                             <m:r>
-                              <a:rPr lang="en-US" sz="2000" i="1">
+                              <a:rPr lang="en-US" sz="2000" b="0" i="1" smtClean="0">
                                 <a:solidFill>
                                   <a:srgbClr val="000000"/>
                                 </a:solidFill>
                                 <a:latin typeface="Cambria Math" panose="02040503050406030204" pitchFamily="18" charset="0"/>
                               </a:rPr>
-                              <m:t>𝑦</m:t>
+                              <m:t>𝑌</m:t>
                             </m:r>
                           </m:e>
                         </m:acc>
@@ -8154,7 +8151,7 @@
                             <m:sSub>
                               <m:sSubPr>
                                 <m:ctrlPr>
-                                  <a:rPr lang="ru-RU" sz="2000" i="1">
+                                  <a:rPr lang="ru-RU" sz="2000" i="1" smtClean="0">
                                     <a:solidFill>
                                       <a:srgbClr val="000000"/>
                                     </a:solidFill>
@@ -8164,13 +8161,13 @@
                               </m:sSubPr>
                               <m:e>
                                 <m:r>
-                                  <a:rPr lang="en-US" sz="2000" i="1">
+                                  <a:rPr lang="en-US" sz="2000" b="0" i="1" smtClean="0">
                                     <a:solidFill>
                                       <a:srgbClr val="000000"/>
                                     </a:solidFill>
                                     <a:latin typeface="Cambria Math" panose="02040503050406030204" pitchFamily="18" charset="0"/>
                                   </a:rPr>
-                                  <m:t>𝑦</m:t>
+                                  <m:t>𝑌</m:t>
                                 </m:r>
                               </m:e>
                               <m:sub>
@@ -8220,13 +8217,13 @@
                                   </m:accPr>
                                   <m:e>
                                     <m:r>
-                                      <a:rPr lang="en-US" sz="2000" i="1">
+                                      <a:rPr lang="en-US" sz="2000" b="0" i="1" smtClean="0">
                                         <a:solidFill>
                                           <a:srgbClr val="000000"/>
                                         </a:solidFill>
                                         <a:latin typeface="Cambria Math" panose="02040503050406030204" pitchFamily="18" charset="0"/>
                                       </a:rPr>
-                                      <m:t>𝑦</m:t>
+                                      <m:t>𝑌</m:t>
                                     </m:r>
                                   </m:e>
                                 </m:acc>
@@ -8649,7 +8646,7 @@
               <a:blipFill>
                 <a:blip r:embed="rId3"/>
                 <a:stretch>
-                  <a:fillRect l="-945" t="-627" r="-945"/>
+                  <a:fillRect l="-945" r="-945" b="-1253"/>
                 </a:stretch>
               </a:blipFill>
             </p:spPr>
@@ -10400,7 +10397,7 @@
             </a:pPr>
             <a:r>
               <a:rPr lang="ru-RU" sz="2000" dirty="0"/>
-              <a:t>Наличие экспериментальной базы сплавов – для исследования доступна выборка из 220 образцов стоматологических сплавов.</a:t>
+              <a:t>Наличие экспериментальной базы сплавов – для исследования доступна выборка из 220 образцов стоматологических композитов.</a:t>
             </a:r>
           </a:p>
         </p:txBody>
@@ -11142,7 +11139,7 @@
           <p:nvPr>
             <p:extLst>
               <p:ext uri="{D42A27DB-BD31-4B8C-83A1-F6EECF244321}">
-                <p14:modId xmlns:p14="http://schemas.microsoft.com/office/powerpoint/2010/main" val="1429785948"/>
+                <p14:modId xmlns:p14="http://schemas.microsoft.com/office/powerpoint/2010/main" val="3051866810"/>
               </p:ext>
             </p:extLst>
           </p:nvPr>
@@ -11382,7 +11379,7 @@
                           <a:ea typeface="+mn-ea"/>
                           <a:cs typeface="+mn-cs"/>
                         </a:rPr>
-                        <a:t>,</a:t>
+                        <a:t>;</a:t>
                       </a:r>
                       <a:endParaRPr lang="ru-RU" sz="1800" kern="1200" dirty="0">
                         <a:solidFill>
@@ -14812,8 +14809,8 @@
           </a:p>
         </p:txBody>
       </p:sp>
-      <mc:AlternateContent xmlns:mc="http://schemas.openxmlformats.org/markup-compatibility/2006" xmlns:a14="http://schemas.microsoft.com/office/drawing/2010/main">
-        <mc:Choice Requires="a14">
+      <mc:AlternateContent xmlns:mc="http://schemas.openxmlformats.org/markup-compatibility/2006">
+        <mc:Choice xmlns:a14="http://schemas.microsoft.com/office/drawing/2010/main" Requires="a14">
           <p:sp>
             <p:nvSpPr>
               <p:cNvPr id="9" name="Подзаголовок 1">
@@ -15297,13 +15294,13 @@
                               </m:sSubPr>
                               <m:e>
                                 <m:r>
-                                  <a:rPr lang="en-US" sz="2000" i="1">
+                                  <a:rPr lang="en-US" sz="2000" b="0" i="1" smtClean="0">
                                     <a:solidFill>
                                       <a:srgbClr val="000000"/>
                                     </a:solidFill>
                                     <a:latin typeface="Cambria Math" panose="02040503050406030204" pitchFamily="18" charset="0"/>
                                   </a:rPr>
-                                  <m:t>𝑦</m:t>
+                                  <m:t>𝑌</m:t>
                                 </m:r>
                               </m:e>
                               <m:sub>
@@ -15353,13 +15350,13 @@
                                   </m:accPr>
                                   <m:e>
                                     <m:r>
-                                      <a:rPr lang="en-US" sz="2000" i="1">
+                                      <a:rPr lang="en-US" sz="2000" b="0" i="1" smtClean="0">
                                         <a:solidFill>
                                           <a:srgbClr val="000000"/>
                                         </a:solidFill>
                                         <a:latin typeface="Cambria Math" panose="02040503050406030204" pitchFamily="18" charset="0"/>
                                       </a:rPr>
-                                      <m:t>𝑦</m:t>
+                                      <m:t>𝑌</m:t>
                                     </m:r>
                                   </m:e>
                                 </m:acc>
@@ -15483,13 +15480,13 @@
                       </m:sSubPr>
                       <m:e>
                         <m:r>
-                          <a:rPr lang="en-US" i="1">
+                          <a:rPr lang="en-US" b="0" i="1" smtClean="0">
                             <a:solidFill>
                               <a:srgbClr val="000000"/>
                             </a:solidFill>
                             <a:latin typeface="Cambria Math" panose="02040503050406030204" pitchFamily="18" charset="0"/>
                           </a:rPr>
-                          <m:t>𝑦</m:t>
+                          <m:t>𝑌</m:t>
                         </m:r>
                       </m:e>
                       <m:sub>
@@ -15572,13 +15569,13 @@
                           </m:accPr>
                           <m:e>
                             <m:r>
-                              <a:rPr lang="en-US" i="1">
+                              <a:rPr lang="en-US" b="0" i="1" smtClean="0">
                                 <a:solidFill>
                                   <a:srgbClr val="000000"/>
                                 </a:solidFill>
                                 <a:latin typeface="Cambria Math" panose="02040503050406030204" pitchFamily="18" charset="0"/>
                               </a:rPr>
-                              <m:t>𝑦</m:t>
+                              <m:t>𝑌</m:t>
                             </m:r>
                           </m:e>
                         </m:acc>
@@ -15635,13 +15632,13 @@
                       </m:sSubPr>
                       <m:e>
                         <m:r>
-                          <a:rPr lang="en-US" i="1">
+                          <a:rPr lang="en-US" b="0" i="1" smtClean="0">
                             <a:solidFill>
                               <a:srgbClr val="000000"/>
                             </a:solidFill>
                             <a:latin typeface="Cambria Math" panose="02040503050406030204" pitchFamily="18" charset="0"/>
                           </a:rPr>
-                          <m:t>𝑥</m:t>
+                          <m:t>𝑋</m:t>
                         </m:r>
                       </m:e>
                       <m:sub>
@@ -15711,13 +15708,13 @@
                       </m:sSubPr>
                       <m:e>
                         <m:r>
-                          <a:rPr lang="en-US" i="1">
+                          <a:rPr lang="en-US" b="0" i="1" smtClean="0">
                             <a:solidFill>
                               <a:srgbClr val="000000"/>
                             </a:solidFill>
                             <a:latin typeface="Cambria Math" panose="02040503050406030204" pitchFamily="18" charset="0"/>
                           </a:rPr>
-                          <m:t>𝑥</m:t>
+                          <m:t>𝑋</m:t>
                         </m:r>
                       </m:e>
                       <m:sub>
@@ -15761,8 +15758,21 @@
                       <a:srgbClr val="000000"/>
                     </a:solidFill>
                   </a:rPr>
-                  <a:t>-го образца:</a:t>
+                  <a:t>-го образца</a:t>
                 </a:r>
+                <a:r>
+                  <a:rPr lang="en-US" dirty="0">
+                    <a:solidFill>
+                      <a:srgbClr val="000000"/>
+                    </a:solidFill>
+                  </a:rPr>
+                  <a:t>,</a:t>
+                </a:r>
+                <a:endParaRPr lang="ru-RU" dirty="0">
+                  <a:solidFill>
+                    <a:srgbClr val="000000"/>
+                  </a:solidFill>
+                </a:endParaRPr>
               </a:p>
               <a:p>
                 <a:pPr marL="1257300" lvl="2" indent="-342900" algn="just">
@@ -15805,7 +15815,7 @@
             </p:txBody>
           </p:sp>
         </mc:Choice>
-        <mc:Fallback xmlns="">
+        <mc:Fallback>
           <p:sp>
             <p:nvSpPr>
               <p:cNvPr id="9" name="Подзаголовок 1">
